--- a/output/broll_002.pptx
+++ b/output/broll_002.pptx
@@ -3169,7 +3169,7 @@
                 </a:solidFill>
                 <a:latin typeface="Calibri"/>
               </a:rPr>
-              <a:t>Security Implementation</a:t>
+              <a:t>Security Measures</a:t>
             </a:r>
           </a:p>
         </p:txBody>
